--- a/docs/QuantSimulation_Project.pptx
+++ b/docs/QuantSimulation_Project.pptx
@@ -5,10 +5,10 @@
     <p:sldMasterId id="2147483660" r:id="rId1"/>
   </p:sldMasterIdLst>
   <p:notesMasterIdLst>
-    <p:notesMasterId r:id="rId36"/>
+    <p:notesMasterId r:id="rId37"/>
   </p:notesMasterIdLst>
   <p:handoutMasterIdLst>
-    <p:handoutMasterId r:id="rId37"/>
+    <p:handoutMasterId r:id="rId38"/>
   </p:handoutMasterIdLst>
   <p:sldIdLst>
     <p:sldId id="256" r:id="rId2"/>
@@ -42,9 +42,10 @@
     <p:sldId id="309" r:id="rId30"/>
     <p:sldId id="293" r:id="rId31"/>
     <p:sldId id="310" r:id="rId32"/>
-    <p:sldId id="311" r:id="rId33"/>
-    <p:sldId id="312" r:id="rId34"/>
-    <p:sldId id="282" r:id="rId35"/>
+    <p:sldId id="317" r:id="rId33"/>
+    <p:sldId id="311" r:id="rId34"/>
+    <p:sldId id="312" r:id="rId35"/>
+    <p:sldId id="282" r:id="rId36"/>
   </p:sldIdLst>
   <p:sldSz cx="12192000" cy="6858000"/>
   <p:notesSz cx="6858000" cy="9144000"/>
@@ -183,6 +184,7 @@
             <p14:sldId id="309"/>
             <p14:sldId id="293"/>
             <p14:sldId id="310"/>
+            <p14:sldId id="317"/>
             <p14:sldId id="311"/>
             <p14:sldId id="312"/>
           </p14:sldIdLst>
@@ -303,7 +305,7 @@
           <a:p>
             <a:fld id="{80680FBE-A8DF-4758-9AC4-3A9E1039168F}" type="datetimeFigureOut">
               <a:rPr lang="en-US" smtClean="0"/>
-              <a:t>6/21/2026</a:t>
+              <a:t>6/22/2026</a:t>
             </a:fld>
             <a:endParaRPr lang="en-US" dirty="0"/>
           </a:p>
@@ -468,7 +470,7 @@
           <a:p>
             <a:fld id="{EC13577B-6902-467D-A26C-08A0DD5E4E03}" type="datetimeFigureOut">
               <a:rPr lang="en-US" smtClean="0"/>
-              <a:t>6/21/2026</a:t>
+              <a:t>6/22/2026</a:t>
             </a:fld>
             <a:endParaRPr lang="en-US" dirty="0"/>
           </a:p>
@@ -894,7 +896,7 @@
           <a:p>
             <a:fld id="{DF61EA0F-A667-4B49-8422-0062BC55E249}" type="slidenum">
               <a:rPr lang="en-US" smtClean="0"/>
-              <a:t>34</a:t>
+              <a:t>35</a:t>
             </a:fld>
             <a:endParaRPr lang="en-US" dirty="0"/>
           </a:p>
@@ -1352,7 +1354,7 @@
             <a:fld id="{8BEEBAAA-29B5-4AF5-BC5F-7E580C29002D}" type="datetimeFigureOut">
               <a:rPr lang="en-US" smtClean="0"/>
               <a:pPr/>
-              <a:t>6/21/2026</a:t>
+              <a:t>6/22/2026</a:t>
             </a:fld>
             <a:endParaRPr lang="en-US" dirty="0"/>
           </a:p>
@@ -1978,7 +1980,7 @@
             <a:fld id="{8BEEBAAA-29B5-4AF5-BC5F-7E580C29002D}" type="datetimeFigureOut">
               <a:rPr lang="en-US" smtClean="0"/>
               <a:pPr/>
-              <a:t>6/21/2026</a:t>
+              <a:t>6/22/2026</a:t>
             </a:fld>
             <a:endParaRPr lang="en-US" dirty="0"/>
           </a:p>
@@ -5554,11 +5556,11 @@
   <p:clrMapOvr>
     <a:masterClrMapping/>
   </p:clrMapOvr>
-  <mc:AlternateContent xmlns:mc="http://schemas.openxmlformats.org/markup-compatibility/2006">
-    <mc:Choice xmlns:p14="http://schemas.microsoft.com/office/powerpoint/2010/main" Requires="p14">
+  <mc:AlternateContent xmlns:mc="http://schemas.openxmlformats.org/markup-compatibility/2006" xmlns:p14="http://schemas.microsoft.com/office/powerpoint/2010/main">
+    <mc:Choice Requires="p14">
       <p:transition p14:dur="10"/>
     </mc:Choice>
-    <mc:Fallback>
+    <mc:Fallback xmlns="">
       <p:transition/>
     </mc:Fallback>
   </mc:AlternateContent>
@@ -5679,11 +5681,11 @@
   <p:clrMapOvr>
     <a:masterClrMapping/>
   </p:clrMapOvr>
-  <mc:AlternateContent xmlns:mc="http://schemas.openxmlformats.org/markup-compatibility/2006">
-    <mc:Choice xmlns:p14="http://schemas.microsoft.com/office/powerpoint/2010/main" Requires="p14">
+  <mc:AlternateContent xmlns:mc="http://schemas.openxmlformats.org/markup-compatibility/2006" xmlns:p14="http://schemas.microsoft.com/office/powerpoint/2010/main">
+    <mc:Choice Requires="p14">
       <p:transition p14:dur="10"/>
     </mc:Choice>
-    <mc:Fallback>
+    <mc:Fallback xmlns="">
       <p:transition/>
     </mc:Fallback>
   </mc:AlternateContent>
@@ -13001,6 +13003,346 @@
         <p:cNvPr id="1" name="">
           <a:extLst>
             <a:ext uri="{FF2B5EF4-FFF2-40B4-BE49-F238E27FC236}">
+              <a16:creationId xmlns:a16="http://schemas.microsoft.com/office/drawing/2014/main" id="{096B05C7-6B88-AAF1-7062-C27ED93F3FAC}"/>
+            </a:ext>
+          </a:extLst>
+        </p:cNvPr>
+        <p:cNvGrpSpPr/>
+        <p:nvPr/>
+      </p:nvGrpSpPr>
+      <p:grpSpPr>
+        <a:xfrm>
+          <a:off x="0" y="0"/>
+          <a:ext cx="0" cy="0"/>
+          <a:chOff x="0" y="0"/>
+          <a:chExt cx="0" cy="0"/>
+        </a:xfrm>
+      </p:grpSpPr>
+      <p:sp>
+        <p:nvSpPr>
+          <p:cNvPr id="4" name="Title 3">
+            <a:extLst>
+              <a:ext uri="{FF2B5EF4-FFF2-40B4-BE49-F238E27FC236}">
+                <a16:creationId xmlns:a16="http://schemas.microsoft.com/office/drawing/2014/main" id="{1812868E-6398-5563-51E5-D0A0B048FAFB}"/>
+              </a:ext>
+            </a:extLst>
+          </p:cNvPr>
+          <p:cNvSpPr>
+            <a:spLocks noGrp="1"/>
+          </p:cNvSpPr>
+          <p:nvPr>
+            <p:ph type="title"/>
+          </p:nvPr>
+        </p:nvSpPr>
+        <p:spPr/>
+        <p:txBody>
+          <a:bodyPr/>
+          <a:lstStyle/>
+          <a:p>
+            <a:r>
+              <a:rPr lang="en-US" b="1" dirty="0"/>
+              <a:t>Core Daily Git Workflow</a:t>
+            </a:r>
+            <a:endParaRPr lang="en-US" b="1" dirty="0">
+              <a:latin typeface="Segoe UI Light" panose="020B0502040204020203" pitchFamily="34" charset="0"/>
+              <a:cs typeface="Segoe UI Light" panose="020B0502040204020203" pitchFamily="34" charset="0"/>
+            </a:endParaRPr>
+          </a:p>
+        </p:txBody>
+      </p:sp>
+      <p:sp>
+        <p:nvSpPr>
+          <p:cNvPr id="3" name="TextBox 2">
+            <a:extLst>
+              <a:ext uri="{FF2B5EF4-FFF2-40B4-BE49-F238E27FC236}">
+                <a16:creationId xmlns:a16="http://schemas.microsoft.com/office/drawing/2014/main" id="{D8FF1127-249D-ECAE-D0EC-29E80172CEB6}"/>
+              </a:ext>
+            </a:extLst>
+          </p:cNvPr>
+          <p:cNvSpPr txBox="1"/>
+          <p:nvPr/>
+        </p:nvSpPr>
+        <p:spPr>
+          <a:xfrm>
+            <a:off x="502388" y="1309445"/>
+            <a:ext cx="5603552" cy="5509200"/>
+          </a:xfrm>
+          <a:prstGeom prst="rect">
+            <a:avLst/>
+          </a:prstGeom>
+          <a:noFill/>
+        </p:spPr>
+        <p:txBody>
+          <a:bodyPr wrap="square">
+            <a:spAutoFit/>
+          </a:bodyPr>
+          <a:lstStyle/>
+          <a:p>
+            <a:r>
+              <a:rPr lang="en-US" sz="1600" dirty="0"/>
+              <a:t>Real Daily Flow (what </a:t>
+            </a:r>
+            <a:r>
+              <a:rPr lang="en-US" sz="1600" dirty="0" err="1"/>
+              <a:t>devs</a:t>
+            </a:r>
+            <a:r>
+              <a:rPr lang="en-US" sz="1600" dirty="0"/>
+              <a:t> actually do)</a:t>
+            </a:r>
+            <a:endParaRPr lang="en-US" sz="1600" b="1" dirty="0"/>
+          </a:p>
+          <a:p>
+            <a:r>
+              <a:rPr lang="en-US" sz="1600" b="1" u="sng" dirty="0"/>
+              <a:t>1. Check status</a:t>
+            </a:r>
+          </a:p>
+          <a:p>
+            <a:r>
+              <a:rPr lang="en-US" sz="1600" dirty="0"/>
+              <a:t>git status</a:t>
+            </a:r>
+          </a:p>
+          <a:p>
+            <a:r>
+              <a:rPr lang="en-US" sz="1600" dirty="0"/>
+              <a:t>👉 Shows: changed files, staged files, branch info</a:t>
+            </a:r>
+          </a:p>
+          <a:p>
+            <a:endParaRPr lang="en-US" sz="1600" dirty="0"/>
+          </a:p>
+          <a:p>
+            <a:r>
+              <a:rPr lang="en-US" sz="1600" b="1" u="sng" dirty="0"/>
+              <a:t>2. Add changes</a:t>
+            </a:r>
+          </a:p>
+          <a:p>
+            <a:r>
+              <a:rPr lang="en-US" sz="1600" dirty="0"/>
+              <a:t>git add file.py</a:t>
+            </a:r>
+            <a:br>
+              <a:rPr lang="en-US" sz="1600" dirty="0"/>
+            </a:br>
+            <a:r>
+              <a:rPr lang="en-US" sz="1600" dirty="0"/>
+              <a:t>git add .</a:t>
+            </a:r>
+          </a:p>
+          <a:p>
+            <a:r>
+              <a:rPr lang="en-US" sz="1600" dirty="0"/>
+              <a:t>👉 Move changes to staging area</a:t>
+            </a:r>
+          </a:p>
+          <a:p>
+            <a:endParaRPr lang="en-US" sz="1600" dirty="0"/>
+          </a:p>
+          <a:p>
+            <a:r>
+              <a:rPr lang="en-US" sz="1600" b="1" u="sng" dirty="0"/>
+              <a:t>3. Commit</a:t>
+            </a:r>
+          </a:p>
+          <a:p>
+            <a:r>
+              <a:rPr lang="fr-FR" sz="1600" dirty="0"/>
+              <a:t>git commit -m "Fix login bug« </a:t>
+            </a:r>
+          </a:p>
+          <a:p>
+            <a:r>
+              <a:rPr lang="en-US" sz="1600" dirty="0"/>
+              <a:t>👉 Save snapshot with message</a:t>
+            </a:r>
+          </a:p>
+          <a:p>
+            <a:endParaRPr lang="en-US" sz="1600" dirty="0"/>
+          </a:p>
+          <a:p>
+            <a:r>
+              <a:rPr lang="en-US" sz="1600" b="1" u="sng" dirty="0"/>
+              <a:t>4. Pull latest changes</a:t>
+            </a:r>
+          </a:p>
+          <a:p>
+            <a:r>
+              <a:rPr lang="en-US" sz="1600" dirty="0"/>
+              <a:t>git pull</a:t>
+            </a:r>
+          </a:p>
+          <a:p>
+            <a:r>
+              <a:rPr lang="en-US" sz="1600" dirty="0"/>
+              <a:t>👉 Always do this before pushing (very important!)</a:t>
+            </a:r>
+          </a:p>
+          <a:p>
+            <a:endParaRPr lang="en-US" sz="1600" dirty="0"/>
+          </a:p>
+          <a:p>
+            <a:r>
+              <a:rPr lang="en-US" sz="1600" b="1" u="sng" dirty="0"/>
+              <a:t>5. Push your code</a:t>
+            </a:r>
+          </a:p>
+          <a:p>
+            <a:r>
+              <a:rPr lang="en-US" sz="1600" dirty="0"/>
+              <a:t>git push</a:t>
+            </a:r>
+          </a:p>
+          <a:p>
+            <a:r>
+              <a:rPr lang="en-US" sz="1600" dirty="0"/>
+              <a:t>👉 Send your changes to remote (GitHub, GitLab, etc.)</a:t>
+            </a:r>
+          </a:p>
+          <a:p>
+            <a:endParaRPr lang="en-US" sz="1600" dirty="0"/>
+          </a:p>
+        </p:txBody>
+      </p:sp>
+      <p:cxnSp>
+        <p:nvCxnSpPr>
+          <p:cNvPr id="5" name="Straight Connector 4">
+            <a:extLst>
+              <a:ext uri="{FF2B5EF4-FFF2-40B4-BE49-F238E27FC236}">
+                <a16:creationId xmlns:a16="http://schemas.microsoft.com/office/drawing/2014/main" id="{9E3581F2-E507-8823-0B6D-425DBFBB9A5D}"/>
+              </a:ext>
+            </a:extLst>
+          </p:cNvPr>
+          <p:cNvCxnSpPr>
+            <a:cxnSpLocks/>
+          </p:cNvCxnSpPr>
+          <p:nvPr/>
+        </p:nvCxnSpPr>
+        <p:spPr>
+          <a:xfrm>
+            <a:off x="6189079" y="1309445"/>
+            <a:ext cx="0" cy="5124569"/>
+          </a:xfrm>
+          <a:prstGeom prst="line">
+            <a:avLst/>
+          </a:prstGeom>
+          <a:ln w="9525"/>
+        </p:spPr>
+        <p:style>
+          <a:lnRef idx="1">
+            <a:schemeClr val="accent1"/>
+          </a:lnRef>
+          <a:fillRef idx="0">
+            <a:schemeClr val="accent1"/>
+          </a:fillRef>
+          <a:effectRef idx="0">
+            <a:schemeClr val="accent1"/>
+          </a:effectRef>
+          <a:fontRef idx="minor">
+            <a:schemeClr val="tx1"/>
+          </a:fontRef>
+        </p:style>
+      </p:cxnSp>
+      <p:sp>
+        <p:nvSpPr>
+          <p:cNvPr id="2" name="TextBox 1">
+            <a:extLst>
+              <a:ext uri="{FF2B5EF4-FFF2-40B4-BE49-F238E27FC236}">
+                <a16:creationId xmlns:a16="http://schemas.microsoft.com/office/drawing/2014/main" id="{519F9AE1-DE84-BE49-CA20-213AA3F43948}"/>
+              </a:ext>
+            </a:extLst>
+          </p:cNvPr>
+          <p:cNvSpPr txBox="1"/>
+          <p:nvPr/>
+        </p:nvSpPr>
+        <p:spPr>
+          <a:xfrm>
+            <a:off x="6439362" y="1289567"/>
+            <a:ext cx="5467715" cy="1908215"/>
+          </a:xfrm>
+          <a:prstGeom prst="rect">
+            <a:avLst/>
+          </a:prstGeom>
+          <a:noFill/>
+        </p:spPr>
+        <p:txBody>
+          <a:bodyPr wrap="square">
+            <a:spAutoFit/>
+          </a:bodyPr>
+          <a:lstStyle/>
+          <a:p>
+            <a:r>
+              <a:rPr lang="en-US" sz="1600" dirty="0"/>
+              <a:t>🔍 Inspect &amp; Debug</a:t>
+            </a:r>
+          </a:p>
+          <a:p>
+            <a:r>
+              <a:rPr lang="en-US" sz="1600" b="1" u="sng" dirty="0"/>
+              <a:t>6. See commit history</a:t>
+            </a:r>
+          </a:p>
+          <a:p>
+            <a:r>
+              <a:rPr lang="nb-NO" dirty="0"/>
+              <a:t>git log</a:t>
+            </a:r>
+            <a:br>
+              <a:rPr lang="nb-NO" dirty="0"/>
+            </a:br>
+            <a:r>
+              <a:rPr lang="nb-NO" dirty="0"/>
+              <a:t>git log –oneline</a:t>
+            </a:r>
+          </a:p>
+          <a:p>
+            <a:endParaRPr lang="en-US" sz="1600" dirty="0"/>
+          </a:p>
+          <a:p>
+            <a:r>
+              <a:rPr lang="en-US" sz="1600" b="1" u="sng" dirty="0"/>
+              <a:t>7. See changes</a:t>
+            </a:r>
+          </a:p>
+          <a:p>
+            <a:r>
+              <a:rPr lang="en-US" sz="1600" dirty="0"/>
+              <a:t>git diff</a:t>
+            </a:r>
+          </a:p>
+        </p:txBody>
+      </p:sp>
+    </p:spTree>
+    <p:extLst>
+      <p:ext uri="{BB962C8B-B14F-4D97-AF65-F5344CB8AC3E}">
+        <p14:creationId xmlns:p14="http://schemas.microsoft.com/office/powerpoint/2010/main" val="3601518147"/>
+      </p:ext>
+    </p:extLst>
+  </p:cSld>
+  <p:clrMapOvr>
+    <a:masterClrMapping/>
+  </p:clrMapOvr>
+  <mc:AlternateContent xmlns:mc="http://schemas.openxmlformats.org/markup-compatibility/2006">
+    <mc:Choice xmlns:p14="http://schemas.microsoft.com/office/powerpoint/2010/main" Requires="p14">
+      <p:transition p14:dur="10"/>
+    </mc:Choice>
+    <mc:Fallback>
+      <p:transition/>
+    </mc:Fallback>
+  </mc:AlternateContent>
+</p:sld>
+</file>
+
+<file path=ppt/slides/slide33.xml><?xml version="1.0" encoding="utf-8"?>
+<p:sld xmlns:a="http://schemas.openxmlformats.org/drawingml/2006/main" xmlns:r="http://schemas.openxmlformats.org/officeDocument/2006/relationships" xmlns:p="http://schemas.openxmlformats.org/presentationml/2006/main">
+  <p:cSld>
+    <p:spTree>
+      <p:nvGrpSpPr>
+        <p:cNvPr id="1" name="">
+          <a:extLst>
+            <a:ext uri="{FF2B5EF4-FFF2-40B4-BE49-F238E27FC236}">
               <a16:creationId xmlns:a16="http://schemas.microsoft.com/office/drawing/2014/main" id="{BF1B33DE-8379-0296-0A37-19C6EC7CD63D}"/>
             </a:ext>
           </a:extLst>
@@ -13307,7 +13649,7 @@
 </p:sld>
 </file>
 
-<file path=ppt/slides/slide33.xml><?xml version="1.0" encoding="utf-8"?>
+<file path=ppt/slides/slide34.xml><?xml version="1.0" encoding="utf-8"?>
 <p:sld xmlns:a="http://schemas.openxmlformats.org/drawingml/2006/main" xmlns:r="http://schemas.openxmlformats.org/officeDocument/2006/relationships" xmlns:p="http://schemas.openxmlformats.org/presentationml/2006/main">
   <p:cSld>
     <p:spTree>
@@ -13621,7 +13963,7 @@
 </p:sld>
 </file>
 
-<file path=ppt/slides/slide34.xml><?xml version="1.0" encoding="utf-8"?>
+<file path=ppt/slides/slide35.xml><?xml version="1.0" encoding="utf-8"?>
 <p:sld xmlns:a="http://schemas.openxmlformats.org/drawingml/2006/main" xmlns:r="http://schemas.openxmlformats.org/officeDocument/2006/relationships" xmlns:p="http://schemas.openxmlformats.org/presentationml/2006/main">
   <p:cSld>
     <p:spTree>
